--- a/SimReal-BP-v34.pptx
+++ b/SimReal-BP-v34.pptx
@@ -6497,7 +6497,7 @@
                 <a:cs typeface="Instrument Sans"/>
                 <a:sym typeface="Instrument Sans"/>
               </a:rPr>
-              <a:t>定制任务、留出交易日、奖励接口；自有或授权数据，交付附授权链</a:t>
+              <a:t>定制任务、留出交易日、奖励接口；数据附授权链</a:t>
             </a:r>
           </a:p>
         </p:txBody>
@@ -6777,7 +6777,7 @@
                 <a:cs typeface="Instrument Sans"/>
                 <a:sym typeface="Instrument Sans"/>
               </a:rPr>
-              <a:t>全套环境、撮合引擎、对手方模型、储备任务、Agent轨迹与专家数据</a:t>
+              <a:t>全套环境、撮合引擎、对手方模型、储备任务与专家数据</a:t>
             </a:r>
           </a:p>
         </p:txBody>
@@ -7236,7 +7236,7 @@
                 <a:cs typeface="Instrument Sans"/>
                 <a:sym typeface="Instrument Sans"/>
               </a:rPr>
-              <a:t>单位经济（估算）：公开版环境平均约6人·天；第2家复用同一环境。买家集中：同一环境授权多家，延伸到交易机构。</a:t>
+              <a:t>单位经济（估算）：公开版环境平均约6人·天，第2家起直接复用。买家集中：可延伸到交易机构。</a:t>
             </a:r>
           </a:p>
         </p:txBody>
@@ -10855,7 +10855,7 @@
                 <a:cs typeface="IBM Plex Mono"/>
                 <a:sym typeface="IBM Plex Mono"/>
               </a:rPr>
-              <a:t>③ 3个已上线领域 · 每年（美元，外推）</a:t>
+              <a:t>③ 若另2个领域与金融同规模（外推）</a:t>
             </a:r>
           </a:p>
         </p:txBody>
@@ -11080,7 +11080,7 @@
                 <a:cs typeface="Instrument Sans"/>
                 <a:sym typeface="Instrument Sans"/>
               </a:rPr>
-              <a:t>× 事件预测、AI研究</a:t>
+              <a:t>交易+事件预测+AI研究</a:t>
             </a:r>
           </a:p>
         </p:txBody>
@@ -11338,22 +11338,7 @@
                 <a:cs typeface="Instrument Sans"/>
                 <a:sym typeface="Instrument Sans"/>
               </a:rPr>
-              <a:t>（Deedy Das，2026年7月）</a:t>
-            </a:r>
-            <a:br>
-              <a:rPr lang="zh-CN" sz="1000"/>
-            </a:br>
-            <a:r>
-              <a:rPr lang="zh-CN" sz="1000" b="0" i="0" u="none" strike="noStrike" cap="none">
-                <a:solidFill>
-                  <a:srgbClr val="E27A3F"/>
-                </a:solidFill>
-                <a:latin typeface="Instrument Sans"/>
-                <a:ea typeface="Instrument Sans"/>
-                <a:cs typeface="Instrument Sans"/>
-                <a:sym typeface="Instrument Sans"/>
-              </a:rPr>
-              <a:t>金融只是第一个领域</a:t>
+              <a:t>来源：Deedy Das，2026年7月</a:t>
             </a:r>
           </a:p>
         </p:txBody>
@@ -11383,7 +11368,7 @@
           </a:bodyPr>
           <a:lstStyle/>
           <a:p>
-            <a:pPr marL="0" marR="0" lvl="0" indent="0" algn="ctr" rtl="0">
+            <a:pPr marL="0" marR="0" lvl="0" indent="0" algn="l" rtl="0">
               <a:spcBef>
                 <a:spcPts val="0"/>
               </a:spcBef>
@@ -11414,7 +11399,7 @@
                 <a:cs typeface="Newsreader"/>
                 <a:sym typeface="Newsreader"/>
               </a:rPr>
-              <a:t>每多一个能计分的领域，再乘一次</a:t>
+              <a:t>每多一个能计分的领域，再加一份</a:t>
             </a:r>
             <a:r>
               <a:rPr lang="zh-CN" sz="2000" b="0" i="0" u="none" strike="noStrike" cap="none">
@@ -11504,7 +11489,7 @@
                 <a:cs typeface="Instrument Sans"/>
                 <a:sym typeface="Instrument Sans"/>
               </a:rPr>
-              <a:t>推算：金融单价取中高段（任务价下限约500美元，据Mechanize每任务约2,400美元训练算力）；每家用量、三层家数（中国参照UniPat订单）与3个领域外推为我们的假设。</a:t>
+              <a:t>推算：金融单价取中高段（任务价下限约500美元，据Mechanize每任务约2,400美元训练算力）；每家用量（中国参照UniPat订单）、三层家数与3个领域外推为我们的假设。</a:t>
             </a:r>
           </a:p>
           <a:p>
@@ -13116,7 +13101,7 @@
                 <a:cs typeface="Instrument Sans"/>
                 <a:sym typeface="Instrument Sans"/>
               </a:rPr>
-              <a:t>量化团队设计撮合与奖励：交易里的纪律直接写进评分器（见下页）</a:t>
+              <a:t>量化团队设计撮合与奖励：交易里的纪律直接写进评分器（第12页）</a:t>
             </a:r>
           </a:p>
         </p:txBody>
@@ -13376,7 +13361,7 @@
                 <a:cs typeface="Instrument Sans"/>
                 <a:sym typeface="Instrument Sans"/>
               </a:rPr>
-              <a:t>同一环境既评测又训练：评测数据、Agent轨迹与迭代训练一起交付</a:t>
+              <a:t>同一环境既评测又训练：Qwen3.8-27B训练后最高+12%（第6页）</a:t>
             </a:r>
           </a:p>
         </p:txBody>
@@ -13506,7 +13491,7 @@
                 <a:cs typeface="Instrument Sans"/>
                 <a:sym typeface="Instrument Sans"/>
               </a:rPr>
-              <a:t>撮合与计分跑在自有引擎上；储备任务与未公开的留出日；7个基准与环境已上线</a:t>
+              <a:t>撮合与计分跑在自有引擎上；7,000+专家候补网络（第8页）</a:t>
             </a:r>
           </a:p>
         </p:txBody>
@@ -14492,7 +14477,7 @@
                 <a:cs typeface="Instrument Sans"/>
                 <a:sym typeface="Instrument Sans"/>
               </a:rPr>
-              <a:t>总分 = max(0, 盈亏 − 0.1×回撤) × 夏普系数</a:t>
+              <a:t>A = max(0, 盈亏 − 0.1×回撤) × 夏普系数</a:t>
             </a:r>
           </a:p>
           <a:p>
@@ -14570,7 +14555,7 @@
                 <a:cs typeface="Instrument Sans"/>
                 <a:sym typeface="Instrument Sans"/>
               </a:rPr>
-              <a:t>收益和风险会背离，奖励必须给风险定价</a:t>
+              <a:t>收益与风险会背离，奖励同时计回撤与夏普</a:t>
             </a:r>
           </a:p>
         </p:txBody>
@@ -14908,7 +14893,7 @@
                 <a:cs typeface="Instrument Sans"/>
                 <a:sym typeface="Instrument Sans"/>
               </a:rPr>
-              <a:t>Jane Street、Citadel、Optiver量化；</a:t>
+              <a:t>三位创始人都有量化机构经历（见第3页），</a:t>
             </a:r>
           </a:p>
           <a:p>
@@ -14934,7 +14919,7 @@
                 <a:cs typeface="Instrument Sans"/>
                 <a:sym typeface="Instrument Sans"/>
               </a:rPr>
-              <a:t>Millennium数据科学；剑桥、LSE、杜克数学</a:t>
+              <a:t>上面三项规则由团队自己设计</a:t>
             </a:r>
           </a:p>
         </p:txBody>
@@ -15064,7 +15049,33 @@
                 <a:cs typeface="Instrument Sans"/>
                 <a:sym typeface="Instrument Sans"/>
               </a:rPr>
-              <a:t>实验室挑环境反复提到的关键标准：高分不能靠钻空子（Epoch AI，18人访谈）</a:t>
+              <a:t>受访者反复列为关键质量标准之一：高分不能靠钻空子</a:t>
+            </a:r>
+          </a:p>
+          <a:p>
+            <a:pPr marL="0" marR="0" lvl="0" indent="0" algn="l" rtl="0">
+              <a:lnSpc>
+                <a:spcPct val="110000"/>
+              </a:lnSpc>
+              <a:spcBef>
+                <a:spcPts val="0"/>
+              </a:spcBef>
+              <a:spcAft>
+                <a:spcPts val="0"/>
+              </a:spcAft>
+              <a:buNone/>
+            </a:pPr>
+            <a:r>
+              <a:rPr lang="zh-CN" sz="1100" b="0" i="0" u="none" strike="noStrike" cap="none">
+                <a:solidFill>
+                  <a:srgbClr val="33322F"/>
+                </a:solidFill>
+                <a:latin typeface="Instrument Sans"/>
+                <a:ea typeface="Instrument Sans"/>
+                <a:cs typeface="Instrument Sans"/>
+                <a:sym typeface="Instrument Sans"/>
+              </a:rPr>
+              <a:t>Epoch AI，18人访谈</a:t>
             </a:r>
           </a:p>
         </p:txBody>
@@ -16324,7 +16335,7 @@
         <p:spPr>
           <a:xfrm>
             <a:off x="548640" y="2286000"/>
-            <a:ext cx="5408676" cy="2560320"/>
+            <a:ext cx="5408676" cy="2670048"/>
           </a:xfrm>
           <a:prstGeom prst="rect">
             <a:avLst/>
@@ -17019,7 +17030,7 @@
         <p:spPr>
           <a:xfrm>
             <a:off x="822960" y="4443984"/>
-            <a:ext cx="1510284" cy="384048"/>
+            <a:ext cx="1510284" cy="457200"/>
           </a:xfrm>
           <a:prstGeom prst="rect">
             <a:avLst/>
@@ -17120,7 +17131,7 @@
         <p:spPr>
           <a:xfrm>
             <a:off x="2442972" y="4443984"/>
-            <a:ext cx="1510284" cy="384048"/>
+            <a:ext cx="1510284" cy="457200"/>
           </a:xfrm>
           <a:prstGeom prst="rect">
             <a:avLst/>
@@ -17221,7 +17232,7 @@
         <p:spPr>
           <a:xfrm>
             <a:off x="4062984" y="4443984"/>
-            <a:ext cx="1510284" cy="384048"/>
+            <a:ext cx="1510284" cy="457200"/>
           </a:xfrm>
           <a:prstGeom prst="rect">
             <a:avLst/>
@@ -17259,7 +17270,33 @@
                 <a:cs typeface="Newsreader"/>
                 <a:sym typeface="Newsreader"/>
               </a:rPr>
-              <a:t>2–3家付费实验室，年化100万–300万美元</a:t>
+              <a:t>2–3家付费实验室</a:t>
+            </a:r>
+          </a:p>
+          <a:p>
+            <a:pPr marL="0" marR="0" lvl="0" indent="0" algn="l" rtl="0">
+              <a:lnSpc>
+                <a:spcPct val="105000"/>
+              </a:lnSpc>
+              <a:spcBef>
+                <a:spcPts val="0"/>
+              </a:spcBef>
+              <a:spcAft>
+                <a:spcPts val="0"/>
+              </a:spcAft>
+              <a:buNone/>
+            </a:pPr>
+            <a:r>
+              <a:rPr lang="zh-CN" sz="1100" b="0" i="0" u="none" strike="noStrike" cap="none">
+                <a:solidFill>
+                  <a:srgbClr val="111110"/>
+                </a:solidFill>
+                <a:latin typeface="Newsreader"/>
+                <a:ea typeface="Newsreader"/>
+                <a:cs typeface="Newsreader"/>
+                <a:sym typeface="Newsreader"/>
+              </a:rPr>
+              <a:t>年化100万–300万美元</a:t>
             </a:r>
           </a:p>
         </p:txBody>
@@ -17273,7 +17310,7 @@
         <p:spPr>
           <a:xfrm>
             <a:off x="6231636" y="2286000"/>
-            <a:ext cx="5408676" cy="2560320"/>
+            <a:ext cx="5408676" cy="2670048"/>
           </a:xfrm>
           <a:prstGeom prst="rect">
             <a:avLst/>
@@ -17870,7 +17907,7 @@
         <p:spPr>
           <a:xfrm>
             <a:off x="6505956" y="4443984"/>
-            <a:ext cx="1510284" cy="384048"/>
+            <a:ext cx="1510284" cy="457200"/>
           </a:xfrm>
           <a:prstGeom prst="rect">
             <a:avLst/>
@@ -17971,7 +18008,7 @@
         <p:spPr>
           <a:xfrm>
             <a:off x="8125968" y="4443984"/>
-            <a:ext cx="1510284" cy="384048"/>
+            <a:ext cx="1510284" cy="457200"/>
           </a:xfrm>
           <a:prstGeom prst="rect">
             <a:avLst/>
@@ -18072,7 +18109,7 @@
         <p:spPr>
           <a:xfrm>
             <a:off x="9745980" y="4443984"/>
-            <a:ext cx="1510284" cy="384048"/>
+            <a:ext cx="1510284" cy="457200"/>
           </a:xfrm>
           <a:prstGeom prst="rect">
             <a:avLst/>
@@ -18123,7 +18160,7 @@
         </p:nvSpPr>
         <p:spPr>
           <a:xfrm>
-            <a:off x="548640" y="4919472"/>
+            <a:off x="548640" y="5047488"/>
             <a:ext cx="7315200" cy="201168"/>
           </a:xfrm>
           <a:prstGeom prst="rect">
@@ -18172,7 +18209,7 @@
         </p:nvSpPr>
         <p:spPr>
           <a:xfrm>
-            <a:off x="548640" y="5138928"/>
+            <a:off x="548640" y="5266944"/>
             <a:ext cx="2601468" cy="548640"/>
           </a:xfrm>
           <a:prstGeom prst="rect">
@@ -18201,7 +18238,7 @@
         </p:nvSpPr>
         <p:spPr>
           <a:xfrm>
-            <a:off x="731520" y="5157216"/>
+            <a:off x="731520" y="5285232"/>
             <a:ext cx="2327148" cy="292608"/>
           </a:xfrm>
           <a:prstGeom prst="rect">
@@ -18262,7 +18299,7 @@
         </p:nvSpPr>
         <p:spPr>
           <a:xfrm>
-            <a:off x="731520" y="5449824"/>
+            <a:off x="731520" y="5577840"/>
             <a:ext cx="2327148" cy="201168"/>
           </a:xfrm>
           <a:prstGeom prst="rect">
@@ -18311,7 +18348,7 @@
         </p:nvSpPr>
         <p:spPr>
           <a:xfrm>
-            <a:off x="3378708" y="5138928"/>
+            <a:off x="3378708" y="5266944"/>
             <a:ext cx="2601468" cy="548640"/>
           </a:xfrm>
           <a:prstGeom prst="rect">
@@ -18340,7 +18377,7 @@
         </p:nvSpPr>
         <p:spPr>
           <a:xfrm>
-            <a:off x="3561588" y="5157216"/>
+            <a:off x="3561588" y="5285232"/>
             <a:ext cx="2327148" cy="292608"/>
           </a:xfrm>
           <a:prstGeom prst="rect">
@@ -18401,7 +18438,7 @@
         </p:nvSpPr>
         <p:spPr>
           <a:xfrm>
-            <a:off x="3561588" y="5449824"/>
+            <a:off x="3561588" y="5577840"/>
             <a:ext cx="2327148" cy="201168"/>
           </a:xfrm>
           <a:prstGeom prst="rect">
@@ -18450,7 +18487,7 @@
         </p:nvSpPr>
         <p:spPr>
           <a:xfrm>
-            <a:off x="6208776" y="5138928"/>
+            <a:off x="6208776" y="5266944"/>
             <a:ext cx="2601468" cy="548640"/>
           </a:xfrm>
           <a:prstGeom prst="rect">
@@ -18479,7 +18516,7 @@
         </p:nvSpPr>
         <p:spPr>
           <a:xfrm>
-            <a:off x="6391656" y="5157216"/>
+            <a:off x="6391656" y="5285232"/>
             <a:ext cx="2327148" cy="292608"/>
           </a:xfrm>
           <a:prstGeom prst="rect">
@@ -18540,7 +18577,7 @@
         </p:nvSpPr>
         <p:spPr>
           <a:xfrm>
-            <a:off x="6391656" y="5449824"/>
+            <a:off x="6391656" y="5577840"/>
             <a:ext cx="2327148" cy="201168"/>
           </a:xfrm>
           <a:prstGeom prst="rect">
@@ -18589,7 +18626,7 @@
         </p:nvSpPr>
         <p:spPr>
           <a:xfrm>
-            <a:off x="9038844" y="5138928"/>
+            <a:off x="9038844" y="5266944"/>
             <a:ext cx="2601468" cy="548640"/>
           </a:xfrm>
           <a:prstGeom prst="rect">
@@ -18618,7 +18655,7 @@
         </p:nvSpPr>
         <p:spPr>
           <a:xfrm>
-            <a:off x="9221724" y="5157216"/>
+            <a:off x="9221724" y="5285232"/>
             <a:ext cx="2327148" cy="292608"/>
           </a:xfrm>
           <a:prstGeom prst="rect">
@@ -18679,7 +18716,7 @@
         </p:nvSpPr>
         <p:spPr>
           <a:xfrm>
-            <a:off x="9221724" y="5449824"/>
+            <a:off x="9221724" y="5577840"/>
             <a:ext cx="2327148" cy="201168"/>
           </a:xfrm>
           <a:prstGeom prst="rect">
@@ -18728,7 +18765,7 @@
         </p:nvSpPr>
         <p:spPr>
           <a:xfrm>
-            <a:off x="548640" y="5760720"/>
+            <a:off x="548640" y="5888736"/>
             <a:ext cx="11091672" cy="201168"/>
           </a:xfrm>
           <a:prstGeom prst="rect">
@@ -19971,7 +20008,7 @@
                 <a:cs typeface="Instrument Sans"/>
                 <a:sym typeface="Instrument Sans"/>
               </a:rPr>
-              <a:t>把交易等专业工作做成可计分、可复现的环境</a:t>
+              <a:t>从交易起步：回放竞赛订单簿，模拟器计分</a:t>
             </a:r>
           </a:p>
           <a:p>
@@ -23853,7 +23890,22 @@
                 <a:cs typeface="Instrument Sans"/>
                 <a:sym typeface="Instrument Sans"/>
               </a:rPr>
-              <a:t>汇丰港元稳定币发行项目唯一实习生，全程协助推进香港金管局（HKMA）合规项目</a:t>
+              <a:t>汇丰港元稳定币发行项目唯一实习生，</a:t>
+            </a:r>
+            <a:br>
+              <a:rPr lang="zh-CN" sz="1050"/>
+            </a:br>
+            <a:r>
+              <a:rPr lang="zh-CN" sz="1050" b="0" i="0" u="none" strike="noStrike" cap="none">
+                <a:solidFill>
+                  <a:srgbClr val="33322F"/>
+                </a:solidFill>
+                <a:latin typeface="Instrument Sans"/>
+                <a:ea typeface="Instrument Sans"/>
+                <a:cs typeface="Instrument Sans"/>
+                <a:sym typeface="Instrument Sans"/>
+              </a:rPr>
+              <a:t>全程协助推进香港金管局（HKMA）合规项目</a:t>
             </a:r>
           </a:p>
           <a:p>
@@ -24548,7 +24600,7 @@
                 <a:cs typeface="Instrument Sans"/>
                 <a:sym typeface="Instrument Sans"/>
               </a:rPr>
-              <a:t>参与落地Plug and Play香港首场活动（联合</a:t>
+              <a:t>参与落地Plug and Play香港首场活动</a:t>
             </a:r>
             <a:br>
               <a:rPr lang="zh-CN" sz="1050"/>
@@ -24563,11 +24615,22 @@
                 <a:cs typeface="Instrument Sans"/>
                 <a:sym typeface="Instrument Sans"/>
               </a:rPr>
-              <a:t>香港科技园）；担任强生MedTech科技峰会</a:t>
-            </a:r>
-            <a:br>
-              <a:rPr lang="zh-CN" sz="1050"/>
-            </a:br>
+              <a:t>（联合香港科技园；200+人规模）</a:t>
+            </a:r>
+          </a:p>
+          <a:p>
+            <a:pPr marL="0" marR="0" lvl="0" indent="0" algn="l" rtl="0">
+              <a:lnSpc>
+                <a:spcPct val="110000"/>
+              </a:lnSpc>
+              <a:spcBef>
+                <a:spcPts val="400"/>
+              </a:spcBef>
+              <a:spcAft>
+                <a:spcPts val="0"/>
+              </a:spcAft>
+              <a:buNone/>
+            </a:pPr>
             <a:r>
               <a:rPr lang="zh-CN" sz="1050" b="0" i="0" u="none" strike="noStrike" cap="none">
                 <a:solidFill>
@@ -24578,7 +24641,7 @@
                 <a:cs typeface="Instrument Sans"/>
                 <a:sym typeface="Instrument Sans"/>
               </a:rPr>
-              <a:t>主持人（均200+人规模）</a:t>
+              <a:t>主持强生MedTech科技峰会（200+人规模）</a:t>
             </a:r>
           </a:p>
           <a:p>
@@ -29325,7 +29388,7 @@
                 <a:cs typeface="Instrument Sans"/>
                 <a:sym typeface="Instrument Sans"/>
               </a:rPr>
-              <a:t>RSI：递归式自我改进，AI参与改进下一代AI；每轮真实结果都成为下一轮的训练数据</a:t>
+              <a:t>RSI：递归式自我改进，AI参与改进下一代AI</a:t>
             </a:r>
           </a:p>
         </p:txBody>
@@ -29990,7 +30053,7 @@
                 <a:cs typeface="Instrument Sans"/>
                 <a:sym typeface="Instrument Sans"/>
               </a:rPr>
-              <a:t>拿到历史订单簿与产品规则，用受限工具研究6或12小时；写出Trader.run(state)，确认后不可撤回</a:t>
+              <a:t>用受限工具研究订单簿6或12小时，写出Trader.run(state)，提交不可撤回</a:t>
             </a:r>
           </a:p>
         </p:txBody>
@@ -30120,7 +30183,7 @@
                 <a:cs typeface="Instrument Sans"/>
                 <a:sym typeface="Instrument Sans"/>
               </a:rPr>
-              <a:t>回放IMC Prosperity交易竞赛订单簿，逐笔撮合，成交按下单时的订单簿归因</a:t>
+              <a:t>回放IMC Prosperity交易竞赛订单簿，逐笔撮合（规则见第12页）</a:t>
             </a:r>
           </a:p>
         </p:txBody>
@@ -30681,7 +30744,33 @@
                 <a:cs typeface="Instrument Sans"/>
                 <a:sym typeface="Instrument Sans"/>
               </a:rPr>
-              <a:t>每个任务×10个随机种子，训练前后配对：均值、95%置信区间、配对检验p值、逐任务增减；储备任务做第二组留出；FuturePredict用真实事件结算，报告训练前后的Brier分数</a:t>
+              <a:t>每个任务×10个随机种子，训练前后配对：均值、95%置信区间、配对检验p值、逐任务增减；</a:t>
+            </a:r>
+          </a:p>
+          <a:p>
+            <a:pPr marL="0" marR="0" lvl="0" indent="0" algn="l" rtl="0">
+              <a:lnSpc>
+                <a:spcPct val="110000"/>
+              </a:lnSpc>
+              <a:spcBef>
+                <a:spcPts val="0"/>
+              </a:spcBef>
+              <a:spcAft>
+                <a:spcPts val="0"/>
+              </a:spcAft>
+              <a:buNone/>
+            </a:pPr>
+            <a:r>
+              <a:rPr lang="zh-CN" sz="1000" b="0" i="0" u="none" strike="noStrike" cap="none">
+                <a:solidFill>
+                  <a:srgbClr val="FAF9F6"/>
+                </a:solidFill>
+                <a:latin typeface="Instrument Sans"/>
+                <a:ea typeface="Instrument Sans"/>
+                <a:cs typeface="Instrument Sans"/>
+                <a:sym typeface="Instrument Sans"/>
+              </a:rPr>
+              <a:t>储备任务做第二组留出；FuturePredict用真实事件结算，报告训练前后的Brier分数</a:t>
             </a:r>
           </a:p>
         </p:txBody>
@@ -30808,7 +30897,7 @@
                 <a:cs typeface="Newsreader"/>
                 <a:sym typeface="Newsreader"/>
               </a:rPr>
-              <a:t>GPT-6在5/7个任务追平人类；多资产仅51分</a:t>
+              <a:t>GPT 6在5/7个任务追平人类；多资产仅51分</a:t>
             </a:r>
           </a:p>
         </p:txBody>
@@ -30935,7 +31024,7 @@
                 <a:cs typeface="Instrument Sans"/>
                 <a:sym typeface="Instrument Sans"/>
               </a:rPr>
-              <a:t>GPT-6</a:t>
+              <a:t>GPT 6</a:t>
             </a:r>
           </a:p>
         </p:txBody>
@@ -31485,8 +31574,8 @@
         </p:nvSpPr>
         <p:spPr>
           <a:xfrm>
-            <a:off x="548640" y="4974336"/>
-            <a:ext cx="11091672" cy="365760"/>
+            <a:off x="548640" y="5047488"/>
+            <a:ext cx="11091672" cy="292608"/>
           </a:xfrm>
           <a:prstGeom prst="rect">
             <a:avLst/>
@@ -32169,7 +32258,7 @@
                 <a:cs typeface="Newsreader"/>
                 <a:sym typeface="Newsreader"/>
               </a:rPr>
-              <a:t>14天上线7个基准与环境，已有5个公开仓库；</a:t>
+              <a:t>7个基准与环境，从交易到软件工程；</a:t>
             </a:r>
             <a:r>
               <a:rPr lang="zh-CN" sz="1600" b="0" i="0" u="none" strike="noStrike" cap="none">
@@ -32181,7 +32270,7 @@
                 <a:cs typeface="Newsreader"/>
                 <a:sym typeface="Newsreader"/>
               </a:rPr>
-              <a:t>零外部融资</a:t>
+              <a:t>5个已开源</a:t>
             </a:r>
           </a:p>
         </p:txBody>
@@ -32605,7 +32694,7 @@
                 <a:cs typeface="Instrument Sans"/>
                 <a:sym typeface="Instrument Sans"/>
               </a:rPr>
-              <a:t>回放竞赛订单簿，按盈亏、回撤与夏普计分；已跑通迭代训练</a:t>
+              <a:t>做市交易旗舰环境，详见第6页</a:t>
             </a:r>
           </a:p>
         </p:txBody>
@@ -34580,7 +34669,7 @@
                 <a:cs typeface="Instrument Sans"/>
                 <a:sym typeface="Instrument Sans"/>
               </a:rPr>
-              <a:t>真实工作里的示范、判断与评分标准，覆盖各行业入门岗位与顶尖科研</a:t>
+              <a:t>真实工作的示范、判断与评分标准，来自专家网络（第8页）</a:t>
             </a:r>
           </a:p>
         </p:txBody>
@@ -34759,7 +34848,7 @@
                 <a:cs typeface="Instrument Sans"/>
                 <a:sym typeface="Instrument Sans"/>
               </a:rPr>
-              <a:t>私有评测集与留出集，只用于检验、从不参与训练；上线前经过攻防测试</a:t>
+              <a:t>私有评测集与留出集：只做检验、不进训练，经攻防测试</a:t>
             </a:r>
           </a:p>
         </p:txBody>
